--- a/Slime Fight.pptx
+++ b/Slime Fight.pptx
@@ -8,10 +8,6 @@
     <p:sldId id="256" r:id="rId2"/>
     <p:sldId id="261" r:id="rId3"/>
     <p:sldId id="257" r:id="rId4"/>
-    <p:sldId id="258" r:id="rId5"/>
-    <p:sldId id="260" r:id="rId6"/>
-    <p:sldId id="259" r:id="rId7"/>
-    <p:sldId id="262" r:id="rId8"/>
   </p:sldIdLst>
   <p:sldSz cx="12192000" cy="6858000"/>
   <p:notesSz cx="6858000" cy="9144000"/>
@@ -110,6 +106,11 @@
       </a:defRPr>
     </a:lvl9pPr>
   </p:defaultTextStyle>
+  <p:extLst>
+    <p:ext uri="{EFAFB233-063F-42B5-8137-9DF3F51BA10A}">
+      <p15:sldGuideLst xmlns:p15="http://schemas.microsoft.com/office/powerpoint/2012/main"/>
+    </p:ext>
+  </p:extLst>
 </p:presentation>
 </file>
 
@@ -260,7 +261,7 @@
           <a:p>
             <a:fld id="{4F0566F7-56BA-4238-ABA2-8E8599AEE832}" type="datetimeFigureOut">
               <a:rPr lang="en-GB" smtClean="0"/>
-              <a:t>09/05/2026</a:t>
+              <a:t>14/05/2026</a:t>
             </a:fld>
             <a:endParaRPr lang="en-GB"/>
           </a:p>
@@ -458,7 +459,7 @@
           <a:p>
             <a:fld id="{4F0566F7-56BA-4238-ABA2-8E8599AEE832}" type="datetimeFigureOut">
               <a:rPr lang="en-GB" smtClean="0"/>
-              <a:t>09/05/2026</a:t>
+              <a:t>14/05/2026</a:t>
             </a:fld>
             <a:endParaRPr lang="en-GB"/>
           </a:p>
@@ -666,7 +667,7 @@
           <a:p>
             <a:fld id="{4F0566F7-56BA-4238-ABA2-8E8599AEE832}" type="datetimeFigureOut">
               <a:rPr lang="en-GB" smtClean="0"/>
-              <a:t>09/05/2026</a:t>
+              <a:t>14/05/2026</a:t>
             </a:fld>
             <a:endParaRPr lang="en-GB"/>
           </a:p>
@@ -864,7 +865,7 @@
           <a:p>
             <a:fld id="{4F0566F7-56BA-4238-ABA2-8E8599AEE832}" type="datetimeFigureOut">
               <a:rPr lang="en-GB" smtClean="0"/>
-              <a:t>09/05/2026</a:t>
+              <a:t>14/05/2026</a:t>
             </a:fld>
             <a:endParaRPr lang="en-GB"/>
           </a:p>
@@ -1139,7 +1140,7 @@
           <a:p>
             <a:fld id="{4F0566F7-56BA-4238-ABA2-8E8599AEE832}" type="datetimeFigureOut">
               <a:rPr lang="en-GB" smtClean="0"/>
-              <a:t>09/05/2026</a:t>
+              <a:t>14/05/2026</a:t>
             </a:fld>
             <a:endParaRPr lang="en-GB"/>
           </a:p>
@@ -1404,7 +1405,7 @@
           <a:p>
             <a:fld id="{4F0566F7-56BA-4238-ABA2-8E8599AEE832}" type="datetimeFigureOut">
               <a:rPr lang="en-GB" smtClean="0"/>
-              <a:t>09/05/2026</a:t>
+              <a:t>14/05/2026</a:t>
             </a:fld>
             <a:endParaRPr lang="en-GB"/>
           </a:p>
@@ -1816,7 +1817,7 @@
           <a:p>
             <a:fld id="{4F0566F7-56BA-4238-ABA2-8E8599AEE832}" type="datetimeFigureOut">
               <a:rPr lang="en-GB" smtClean="0"/>
-              <a:t>09/05/2026</a:t>
+              <a:t>14/05/2026</a:t>
             </a:fld>
             <a:endParaRPr lang="en-GB"/>
           </a:p>
@@ -1957,7 +1958,7 @@
           <a:p>
             <a:fld id="{4F0566F7-56BA-4238-ABA2-8E8599AEE832}" type="datetimeFigureOut">
               <a:rPr lang="en-GB" smtClean="0"/>
-              <a:t>09/05/2026</a:t>
+              <a:t>14/05/2026</a:t>
             </a:fld>
             <a:endParaRPr lang="en-GB"/>
           </a:p>
@@ -2070,7 +2071,7 @@
           <a:p>
             <a:fld id="{4F0566F7-56BA-4238-ABA2-8E8599AEE832}" type="datetimeFigureOut">
               <a:rPr lang="en-GB" smtClean="0"/>
-              <a:t>09/05/2026</a:t>
+              <a:t>14/05/2026</a:t>
             </a:fld>
             <a:endParaRPr lang="en-GB"/>
           </a:p>
@@ -2381,7 +2382,7 @@
           <a:p>
             <a:fld id="{4F0566F7-56BA-4238-ABA2-8E8599AEE832}" type="datetimeFigureOut">
               <a:rPr lang="en-GB" smtClean="0"/>
-              <a:t>09/05/2026</a:t>
+              <a:t>14/05/2026</a:t>
             </a:fld>
             <a:endParaRPr lang="en-GB"/>
           </a:p>
@@ -2669,7 +2670,7 @@
           <a:p>
             <a:fld id="{4F0566F7-56BA-4238-ABA2-8E8599AEE832}" type="datetimeFigureOut">
               <a:rPr lang="en-GB" smtClean="0"/>
-              <a:t>09/05/2026</a:t>
+              <a:t>14/05/2026</a:t>
             </a:fld>
             <a:endParaRPr lang="en-GB"/>
           </a:p>
@@ -2910,7 +2911,7 @@
           <a:p>
             <a:fld id="{4F0566F7-56BA-4238-ABA2-8E8599AEE832}" type="datetimeFigureOut">
               <a:rPr lang="en-GB" smtClean="0"/>
-              <a:t>09/05/2026</a:t>
+              <a:t>14/05/2026</a:t>
             </a:fld>
             <a:endParaRPr lang="en-GB"/>
           </a:p>
@@ -3991,7 +3992,7 @@
         <p:spPr>
           <a:xfrm>
             <a:off x="1303564" y="1852613"/>
-            <a:ext cx="3633107" cy="2585323"/>
+            <a:ext cx="3633107" cy="1477328"/>
           </a:xfrm>
           <a:prstGeom prst="rect">
             <a:avLst/>
@@ -4119,124 +4120,6 @@
                 <a:latin typeface="Arial" panose="020B0604020202020204" pitchFamily="34" charset="0"/>
               </a:rPr>
               <a:t> Main objective </a:t>
-            </a:r>
-          </a:p>
-          <a:p>
-            <a:pPr marL="0" marR="0" lvl="0" indent="0" algn="l" defTabSz="914400" rtl="0" eaLnBrk="0" fontAlgn="base" latinLnBrk="0" hangingPunct="0">
-              <a:lnSpc>
-                <a:spcPct val="100000"/>
-              </a:lnSpc>
-              <a:spcBef>
-                <a:spcPct val="0"/>
-              </a:spcBef>
-              <a:spcAft>
-                <a:spcPct val="0"/>
-              </a:spcAft>
-              <a:buClrTx/>
-              <a:buSzTx/>
-              <a:buFontTx/>
-              <a:buChar char="•"/>
-              <a:tabLst/>
-            </a:pPr>
-            <a:endParaRPr kumimoji="0" lang="en-US" altLang="en-US" sz="1800" b="0" i="0" u="none" strike="noStrike" cap="none" normalizeH="0" baseline="0" dirty="0">
-              <a:ln>
-                <a:noFill/>
-              </a:ln>
-              <a:solidFill>
-                <a:schemeClr val="tx1"/>
-              </a:solidFill>
-              <a:effectLst/>
-              <a:latin typeface="Arial" panose="020B0604020202020204" pitchFamily="34" charset="0"/>
-            </a:endParaRPr>
-          </a:p>
-          <a:p>
-            <a:pPr marL="0" marR="0" lvl="0" indent="0" algn="l" defTabSz="914400" rtl="0" eaLnBrk="0" fontAlgn="base" latinLnBrk="0" hangingPunct="0">
-              <a:lnSpc>
-                <a:spcPct val="100000"/>
-              </a:lnSpc>
-              <a:spcBef>
-                <a:spcPct val="0"/>
-              </a:spcBef>
-              <a:spcAft>
-                <a:spcPct val="0"/>
-              </a:spcAft>
-              <a:buClrTx/>
-              <a:buSzTx/>
-              <a:buFontTx/>
-              <a:buChar char="•"/>
-              <a:tabLst/>
-            </a:pPr>
-            <a:r>
-              <a:rPr kumimoji="0" lang="en-US" altLang="en-US" sz="1800" b="0" i="0" u="none" strike="noStrike" cap="none" normalizeH="0" baseline="0" dirty="0">
-                <a:ln>
-                  <a:noFill/>
-                </a:ln>
-                <a:solidFill>
-                  <a:schemeClr val="tx1"/>
-                </a:solidFill>
-                <a:effectLst/>
-                <a:latin typeface="Arial" panose="020B0604020202020204" pitchFamily="34" charset="0"/>
-              </a:rPr>
-              <a:t> Target audience </a:t>
-            </a:r>
-          </a:p>
-          <a:p>
-            <a:pPr marL="0" marR="0" lvl="0" indent="0" algn="l" defTabSz="914400" rtl="0" eaLnBrk="0" fontAlgn="base" latinLnBrk="0" hangingPunct="0">
-              <a:lnSpc>
-                <a:spcPct val="100000"/>
-              </a:lnSpc>
-              <a:spcBef>
-                <a:spcPct val="0"/>
-              </a:spcBef>
-              <a:spcAft>
-                <a:spcPct val="0"/>
-              </a:spcAft>
-              <a:buClrTx/>
-              <a:buSzTx/>
-              <a:buFontTx/>
-              <a:buChar char="•"/>
-              <a:tabLst/>
-            </a:pPr>
-            <a:endParaRPr kumimoji="0" lang="en-US" altLang="en-US" sz="1800" b="0" i="0" u="none" strike="noStrike" cap="none" normalizeH="0" baseline="0" dirty="0">
-              <a:ln>
-                <a:noFill/>
-              </a:ln>
-              <a:solidFill>
-                <a:schemeClr val="tx1"/>
-              </a:solidFill>
-              <a:effectLst/>
-              <a:latin typeface="Arial" panose="020B0604020202020204" pitchFamily="34" charset="0"/>
-            </a:endParaRPr>
-          </a:p>
-          <a:p>
-            <a:pPr marL="0" marR="0" lvl="0" indent="0" algn="l" defTabSz="914400" rtl="0" eaLnBrk="0" fontAlgn="base" latinLnBrk="0" hangingPunct="0">
-              <a:lnSpc>
-                <a:spcPct val="100000"/>
-              </a:lnSpc>
-              <a:spcBef>
-                <a:spcPct val="0"/>
-              </a:spcBef>
-              <a:spcAft>
-                <a:spcPct val="0"/>
-              </a:spcAft>
-              <a:buClrTx/>
-              <a:buSzTx/>
-              <a:buFontTx/>
-              <a:buChar char="•"/>
-              <a:tabLst/>
-            </a:pPr>
-            <a:r>
-              <a:rPr kumimoji="0" lang="en-US" altLang="en-US" sz="1800" b="0" i="0" u="none" strike="noStrike" cap="none" normalizeH="0" baseline="0" dirty="0">
-                <a:ln>
-                  <a:noFill/>
-                </a:ln>
-                <a:solidFill>
-                  <a:schemeClr val="tx1"/>
-                </a:solidFill>
-                <a:effectLst/>
-                <a:latin typeface="Arial" panose="020B0604020202020204" pitchFamily="34" charset="0"/>
-              </a:rPr>
-              <a:t>  Basic gameplay concept </a:t>
             </a:r>
           </a:p>
           <a:p>
@@ -4298,7 +4181,7 @@
             <a:pPr algn="ctr"/>
             <a:r>
               <a:rPr lang="en-GB" dirty="0"/>
-              <a:t>Game Story</a:t>
+              <a:t>Technical Features</a:t>
             </a:r>
           </a:p>
         </p:txBody>
@@ -4317,8 +4200,8 @@
         </p:nvSpPr>
         <p:spPr>
           <a:xfrm>
-            <a:off x="1074964" y="1862138"/>
-            <a:ext cx="3633107" cy="923330"/>
+            <a:off x="1074965" y="1862138"/>
+            <a:ext cx="3464952" cy="2585323"/>
           </a:xfrm>
           <a:prstGeom prst="rect">
             <a:avLst/>
@@ -4331,7 +4214,7 @@
           </a:bodyPr>
           <a:lstStyle/>
           <a:p>
-            <a:pPr marL="0" marR="0" lvl="0" indent="0" algn="l" defTabSz="914400" rtl="0" eaLnBrk="0" fontAlgn="base" latinLnBrk="0" hangingPunct="0">
+            <a:pPr marL="285750" marR="0" lvl="0" indent="-285750" algn="l" defTabSz="914400" rtl="0" eaLnBrk="0" fontAlgn="base" latinLnBrk="0" hangingPunct="0">
               <a:lnSpc>
                 <a:spcPct val="100000"/>
               </a:lnSpc>
@@ -4343,8 +4226,39 @@
               </a:spcAft>
               <a:buClrTx/>
               <a:buSzTx/>
-              <a:buFontTx/>
-              <a:buNone/>
+              <a:buFont typeface="Arial" panose="020B0604020202020204" pitchFamily="34" charset="0"/>
+              <a:buChar char="•"/>
+              <a:tabLst/>
+            </a:pPr>
+            <a:r>
+              <a:rPr kumimoji="0" lang="en-US" altLang="en-US" sz="1800" b="0" i="0" u="none" strike="noStrike" cap="none" normalizeH="0" baseline="0" dirty="0">
+                <a:ln>
+                  <a:noFill/>
+                </a:ln>
+                <a:solidFill>
+                  <a:schemeClr val="tx1"/>
+                </a:solidFill>
+                <a:effectLst/>
+                <a:latin typeface="Arial" panose="020B0604020202020204" pitchFamily="34" charset="0"/>
+              </a:rPr>
+              <a:t>AI systems </a:t>
+            </a:r>
+          </a:p>
+          <a:p>
+            <a:pPr marL="285750" marR="0" lvl="0" indent="-285750" algn="l" defTabSz="914400" rtl="0" eaLnBrk="0" fontAlgn="base" latinLnBrk="0" hangingPunct="0">
+              <a:lnSpc>
+                <a:spcPct val="100000"/>
+              </a:lnSpc>
+              <a:spcBef>
+                <a:spcPct val="0"/>
+              </a:spcBef>
+              <a:spcAft>
+                <a:spcPct val="0"/>
+              </a:spcAft>
+              <a:buClrTx/>
+              <a:buSzTx/>
+              <a:buFont typeface="Arial" panose="020B0604020202020204" pitchFamily="34" charset="0"/>
+              <a:buChar char="•"/>
               <a:tabLst/>
             </a:pPr>
             <a:endParaRPr kumimoji="0" lang="en-US" altLang="en-US" sz="1800" b="0" i="0" u="none" strike="noStrike" cap="none" normalizeH="0" baseline="0" dirty="0">
@@ -4359,7 +4273,7 @@
             </a:endParaRPr>
           </a:p>
           <a:p>
-            <a:pPr marL="0" marR="0" lvl="0" indent="0" algn="l" defTabSz="914400" rtl="0" eaLnBrk="0" fontAlgn="base" latinLnBrk="0" hangingPunct="0">
+            <a:pPr marL="285750" marR="0" lvl="0" indent="-285750" algn="l" defTabSz="914400" rtl="0" eaLnBrk="0" fontAlgn="base" latinLnBrk="0" hangingPunct="0">
               <a:lnSpc>
                 <a:spcPct val="100000"/>
               </a:lnSpc>
@@ -4371,7 +4285,7 @@
               </a:spcAft>
               <a:buClrTx/>
               <a:buSzTx/>
-              <a:buFontTx/>
+              <a:buFont typeface="Arial" panose="020B0604020202020204" pitchFamily="34" charset="0"/>
               <a:buChar char="•"/>
               <a:tabLst/>
             </a:pPr>
@@ -4386,10 +4300,183 @@
                 <a:effectLst/>
                 <a:latin typeface="Arial" panose="020B0604020202020204" pitchFamily="34" charset="0"/>
               </a:rPr>
-              <a:t> What the goal of the game?</a:t>
-            </a:r>
-          </a:p>
-          <a:p>
+              <a:t>Save/load system </a:t>
+            </a:r>
+          </a:p>
+          <a:p>
+            <a:pPr marL="285750" marR="0" lvl="0" indent="-285750" algn="l" defTabSz="914400" rtl="0" eaLnBrk="0" fontAlgn="base" latinLnBrk="0" hangingPunct="0">
+              <a:lnSpc>
+                <a:spcPct val="100000"/>
+              </a:lnSpc>
+              <a:spcBef>
+                <a:spcPct val="0"/>
+              </a:spcBef>
+              <a:spcAft>
+                <a:spcPct val="0"/>
+              </a:spcAft>
+              <a:buClrTx/>
+              <a:buSzTx/>
+              <a:buFont typeface="Arial" panose="020B0604020202020204" pitchFamily="34" charset="0"/>
+              <a:buChar char="•"/>
+              <a:tabLst/>
+            </a:pPr>
+            <a:endParaRPr kumimoji="0" lang="en-US" altLang="en-US" sz="1800" b="0" i="0" u="none" strike="noStrike" cap="none" normalizeH="0" baseline="0" dirty="0">
+              <a:ln>
+                <a:noFill/>
+              </a:ln>
+              <a:solidFill>
+                <a:schemeClr val="tx1"/>
+              </a:solidFill>
+              <a:effectLst/>
+              <a:latin typeface="Arial" panose="020B0604020202020204" pitchFamily="34" charset="0"/>
+            </a:endParaRPr>
+          </a:p>
+          <a:p>
+            <a:pPr marL="285750" marR="0" lvl="0" indent="-285750" algn="l" defTabSz="914400" rtl="0" eaLnBrk="0" fontAlgn="base" latinLnBrk="0" hangingPunct="0">
+              <a:lnSpc>
+                <a:spcPct val="100000"/>
+              </a:lnSpc>
+              <a:spcBef>
+                <a:spcPct val="0"/>
+              </a:spcBef>
+              <a:spcAft>
+                <a:spcPct val="0"/>
+              </a:spcAft>
+              <a:buClrTx/>
+              <a:buSzTx/>
+              <a:buFont typeface="Arial" panose="020B0604020202020204" pitchFamily="34" charset="0"/>
+              <a:buChar char="•"/>
+              <a:tabLst/>
+            </a:pPr>
+            <a:r>
+              <a:rPr kumimoji="0" lang="en-US" altLang="en-US" sz="1800" b="0" i="0" u="none" strike="noStrike" cap="none" normalizeH="0" baseline="0" dirty="0">
+                <a:ln>
+                  <a:noFill/>
+                </a:ln>
+                <a:solidFill>
+                  <a:schemeClr val="tx1"/>
+                </a:solidFill>
+                <a:effectLst/>
+                <a:latin typeface="Arial" panose="020B0604020202020204" pitchFamily="34" charset="0"/>
+              </a:rPr>
+              <a:t>Dialogue system </a:t>
+            </a:r>
+          </a:p>
+          <a:p>
+            <a:pPr marL="285750" marR="0" lvl="0" indent="-285750" algn="l" defTabSz="914400" rtl="0" eaLnBrk="0" fontAlgn="base" latinLnBrk="0" hangingPunct="0">
+              <a:lnSpc>
+                <a:spcPct val="100000"/>
+              </a:lnSpc>
+              <a:spcBef>
+                <a:spcPct val="0"/>
+              </a:spcBef>
+              <a:spcAft>
+                <a:spcPct val="0"/>
+              </a:spcAft>
+              <a:buClrTx/>
+              <a:buSzTx/>
+              <a:buFont typeface="Arial" panose="020B0604020202020204" pitchFamily="34" charset="0"/>
+              <a:buChar char="•"/>
+              <a:tabLst/>
+            </a:pPr>
+            <a:endParaRPr kumimoji="0" lang="en-US" altLang="en-US" sz="1800" b="0" i="0" u="none" strike="noStrike" cap="none" normalizeH="0" baseline="0" dirty="0">
+              <a:ln>
+                <a:noFill/>
+              </a:ln>
+              <a:solidFill>
+                <a:schemeClr val="tx1"/>
+              </a:solidFill>
+              <a:effectLst/>
+              <a:latin typeface="Arial" panose="020B0604020202020204" pitchFamily="34" charset="0"/>
+            </a:endParaRPr>
+          </a:p>
+          <a:p>
+            <a:pPr marL="285750" marR="0" lvl="0" indent="-285750" algn="l" defTabSz="914400" rtl="0" eaLnBrk="0" fontAlgn="base" latinLnBrk="0" hangingPunct="0">
+              <a:lnSpc>
+                <a:spcPct val="100000"/>
+              </a:lnSpc>
+              <a:spcBef>
+                <a:spcPct val="0"/>
+              </a:spcBef>
+              <a:spcAft>
+                <a:spcPct val="0"/>
+              </a:spcAft>
+              <a:buClrTx/>
+              <a:buSzTx/>
+              <a:buFont typeface="Arial" panose="020B0604020202020204" pitchFamily="34" charset="0"/>
+              <a:buChar char="•"/>
+              <a:tabLst/>
+            </a:pPr>
+            <a:r>
+              <a:rPr kumimoji="0" lang="en-US" altLang="en-US" sz="1800" b="0" i="0" u="none" strike="noStrike" cap="none" normalizeH="0" baseline="0" dirty="0">
+                <a:ln>
+                  <a:noFill/>
+                </a:ln>
+                <a:solidFill>
+                  <a:schemeClr val="tx1"/>
+                </a:solidFill>
+                <a:effectLst/>
+                <a:latin typeface="Arial" panose="020B0604020202020204" pitchFamily="34" charset="0"/>
+              </a:rPr>
+              <a:t>Environmental hazards</a:t>
+            </a:r>
+          </a:p>
+          <a:p>
+            <a:pPr marR="0" lvl="0" algn="l" defTabSz="914400" rtl="0" eaLnBrk="0" fontAlgn="base" latinLnBrk="0" hangingPunct="0">
+              <a:lnSpc>
+                <a:spcPct val="100000"/>
+              </a:lnSpc>
+              <a:spcBef>
+                <a:spcPct val="0"/>
+              </a:spcBef>
+              <a:spcAft>
+                <a:spcPct val="0"/>
+              </a:spcAft>
+              <a:buClrTx/>
+              <a:buSzTx/>
+              <a:tabLst/>
+            </a:pPr>
+            <a:endParaRPr kumimoji="0" lang="en-US" altLang="en-US" sz="1800" b="0" i="0" u="none" strike="noStrike" cap="none" normalizeH="0" baseline="0" dirty="0">
+              <a:ln>
+                <a:noFill/>
+              </a:ln>
+              <a:solidFill>
+                <a:schemeClr val="tx1"/>
+              </a:solidFill>
+              <a:effectLst/>
+              <a:latin typeface="Arial" panose="020B0604020202020204" pitchFamily="34" charset="0"/>
+            </a:endParaRPr>
+          </a:p>
+          <a:p>
+            <a:pPr marL="285750" marR="0" lvl="0" indent="-285750" algn="l" defTabSz="914400" rtl="0" eaLnBrk="0" fontAlgn="base" latinLnBrk="0" hangingPunct="0">
+              <a:lnSpc>
+                <a:spcPct val="100000"/>
+              </a:lnSpc>
+              <a:spcBef>
+                <a:spcPct val="0"/>
+              </a:spcBef>
+              <a:spcAft>
+                <a:spcPct val="0"/>
+              </a:spcAft>
+              <a:buClrTx/>
+              <a:buSzTx/>
+              <a:buFont typeface="Arial" panose="020B0604020202020204" pitchFamily="34" charset="0"/>
+              <a:buChar char="•"/>
+              <a:tabLst/>
+            </a:pPr>
+            <a:r>
+              <a:rPr kumimoji="0" lang="en-US" altLang="en-US" sz="1800" b="0" i="0" u="none" strike="noStrike" cap="none" normalizeH="0" baseline="0" dirty="0">
+                <a:ln>
+                  <a:noFill/>
+                </a:ln>
+                <a:solidFill>
+                  <a:schemeClr val="tx1"/>
+                </a:solidFill>
+                <a:effectLst/>
+                <a:latin typeface="Arial" panose="020B0604020202020204" pitchFamily="34" charset="0"/>
+              </a:rPr>
+              <a:t>Animation systems</a:t>
+            </a:r>
             <a:endParaRPr lang="en-GB" dirty="0"/>
           </a:p>
         </p:txBody>
@@ -4398,441 +4485,6 @@
     <p:extLst>
       <p:ext uri="{BB962C8B-B14F-4D97-AF65-F5344CB8AC3E}">
         <p14:creationId xmlns:p14="http://schemas.microsoft.com/office/powerpoint/2010/main" val="3311584670"/>
-      </p:ext>
-    </p:extLst>
-  </p:cSld>
-  <p:clrMapOvr>
-    <a:masterClrMapping/>
-  </p:clrMapOvr>
-</p:sld>
-</file>
-
-<file path=ppt/slides/slide4.xml><?xml version="1.0" encoding="utf-8"?>
-<p:sld xmlns:a="http://schemas.openxmlformats.org/drawingml/2006/main" xmlns:r="http://schemas.openxmlformats.org/officeDocument/2006/relationships" xmlns:p="http://schemas.openxmlformats.org/presentationml/2006/main">
-  <p:cSld>
-    <p:spTree>
-      <p:nvGrpSpPr>
-        <p:cNvPr id="1" name=""/>
-        <p:cNvGrpSpPr/>
-        <p:nvPr/>
-      </p:nvGrpSpPr>
-      <p:grpSpPr>
-        <a:xfrm>
-          <a:off x="0" y="0"/>
-          <a:ext cx="0" cy="0"/>
-          <a:chOff x="0" y="0"/>
-          <a:chExt cx="0" cy="0"/>
-        </a:xfrm>
-      </p:grpSpPr>
-      <p:sp>
-        <p:nvSpPr>
-          <p:cNvPr id="2" name="Title 1">
-            <a:extLst>
-              <a:ext uri="{FF2B5EF4-FFF2-40B4-BE49-F238E27FC236}">
-                <a16:creationId xmlns:a16="http://schemas.microsoft.com/office/drawing/2014/main" id="{E7A76357-A201-9642-7941-D2C2EF9A871B}"/>
-              </a:ext>
-            </a:extLst>
-          </p:cNvPr>
-          <p:cNvSpPr>
-            <a:spLocks noGrp="1"/>
-          </p:cNvSpPr>
-          <p:nvPr>
-            <p:ph type="title"/>
-          </p:nvPr>
-        </p:nvSpPr>
-        <p:spPr/>
-        <p:txBody>
-          <a:bodyPr/>
-          <a:lstStyle/>
-          <a:p>
-            <a:pPr algn="ctr"/>
-            <a:r>
-              <a:rPr lang="en-GB" dirty="0"/>
-              <a:t>Game Logic + Systems</a:t>
-            </a:r>
-          </a:p>
-        </p:txBody>
-      </p:sp>
-      <p:sp>
-        <p:nvSpPr>
-          <p:cNvPr id="3" name="Content Placeholder 2">
-            <a:extLst>
-              <a:ext uri="{FF2B5EF4-FFF2-40B4-BE49-F238E27FC236}">
-                <a16:creationId xmlns:a16="http://schemas.microsoft.com/office/drawing/2014/main" id="{11596A75-71B5-608B-7879-065F789EB57A}"/>
-              </a:ext>
-            </a:extLst>
-          </p:cNvPr>
-          <p:cNvSpPr>
-            <a:spLocks noGrp="1"/>
-          </p:cNvSpPr>
-          <p:nvPr>
-            <p:ph idx="1"/>
-          </p:nvPr>
-        </p:nvSpPr>
-        <p:spPr>
-          <a:xfrm>
-            <a:off x="838200" y="1419225"/>
-            <a:ext cx="10515600" cy="4224338"/>
-          </a:xfrm>
-        </p:spPr>
-        <p:txBody>
-          <a:bodyPr/>
-          <a:lstStyle/>
-          <a:p>
-            <a:pPr marL="457200" lvl="1" indent="0">
-              <a:buNone/>
-            </a:pPr>
-            <a:endParaRPr lang="en-GB" dirty="0"/>
-          </a:p>
-          <a:p>
-            <a:r>
-              <a:rPr lang="en-GB" dirty="0"/>
-              <a:t>Collision</a:t>
-            </a:r>
-          </a:p>
-          <a:p>
-            <a:r>
-              <a:rPr lang="en-GB" dirty="0"/>
-              <a:t>Wave System</a:t>
-            </a:r>
-          </a:p>
-          <a:p>
-            <a:r>
-              <a:rPr lang="en-GB" dirty="0"/>
-              <a:t>Player Resources</a:t>
-            </a:r>
-          </a:p>
-          <a:p>
-            <a:r>
-              <a:rPr lang="en-GB" dirty="0"/>
-              <a:t>Upgrades</a:t>
-            </a:r>
-          </a:p>
-          <a:p>
-            <a:r>
-              <a:rPr lang="en-GB" dirty="0"/>
-              <a:t>Save</a:t>
-            </a:r>
-          </a:p>
-          <a:p>
-            <a:endParaRPr lang="en-GB" dirty="0"/>
-          </a:p>
-        </p:txBody>
-      </p:sp>
-    </p:spTree>
-    <p:extLst>
-      <p:ext uri="{BB962C8B-B14F-4D97-AF65-F5344CB8AC3E}">
-        <p14:creationId xmlns:p14="http://schemas.microsoft.com/office/powerpoint/2010/main" val="1400688798"/>
-      </p:ext>
-    </p:extLst>
-  </p:cSld>
-  <p:clrMapOvr>
-    <a:masterClrMapping/>
-  </p:clrMapOvr>
-</p:sld>
-</file>
-
-<file path=ppt/slides/slide5.xml><?xml version="1.0" encoding="utf-8"?>
-<p:sld xmlns:a="http://schemas.openxmlformats.org/drawingml/2006/main" xmlns:r="http://schemas.openxmlformats.org/officeDocument/2006/relationships" xmlns:p="http://schemas.openxmlformats.org/presentationml/2006/main">
-  <p:cSld>
-    <p:spTree>
-      <p:nvGrpSpPr>
-        <p:cNvPr id="1" name=""/>
-        <p:cNvGrpSpPr/>
-        <p:nvPr/>
-      </p:nvGrpSpPr>
-      <p:grpSpPr>
-        <a:xfrm>
-          <a:off x="0" y="0"/>
-          <a:ext cx="0" cy="0"/>
-          <a:chOff x="0" y="0"/>
-          <a:chExt cx="0" cy="0"/>
-        </a:xfrm>
-      </p:grpSpPr>
-      <p:sp>
-        <p:nvSpPr>
-          <p:cNvPr id="2" name="Title 1">
-            <a:extLst>
-              <a:ext uri="{FF2B5EF4-FFF2-40B4-BE49-F238E27FC236}">
-                <a16:creationId xmlns:a16="http://schemas.microsoft.com/office/drawing/2014/main" id="{DCDB3DEF-8C3F-B684-3374-46295CF8418E}"/>
-              </a:ext>
-            </a:extLst>
-          </p:cNvPr>
-          <p:cNvSpPr>
-            <a:spLocks noGrp="1"/>
-          </p:cNvSpPr>
-          <p:nvPr>
-            <p:ph type="title"/>
-          </p:nvPr>
-        </p:nvSpPr>
-        <p:spPr/>
-        <p:txBody>
-          <a:bodyPr/>
-          <a:lstStyle/>
-          <a:p>
-            <a:pPr algn="ctr"/>
-            <a:r>
-              <a:rPr lang="en-GB" dirty="0"/>
-              <a:t>Progression</a:t>
-            </a:r>
-          </a:p>
-        </p:txBody>
-      </p:sp>
-      <p:sp>
-        <p:nvSpPr>
-          <p:cNvPr id="3" name="Content Placeholder 2">
-            <a:extLst>
-              <a:ext uri="{FF2B5EF4-FFF2-40B4-BE49-F238E27FC236}">
-                <a16:creationId xmlns:a16="http://schemas.microsoft.com/office/drawing/2014/main" id="{BAF530B5-FFC1-78EE-0189-29DA30D28A70}"/>
-              </a:ext>
-            </a:extLst>
-          </p:cNvPr>
-          <p:cNvSpPr>
-            <a:spLocks noGrp="1"/>
-          </p:cNvSpPr>
-          <p:nvPr>
-            <p:ph idx="1"/>
-          </p:nvPr>
-        </p:nvSpPr>
-        <p:spPr/>
-        <p:txBody>
-          <a:bodyPr/>
-          <a:lstStyle/>
-          <a:p>
-            <a:r>
-              <a:rPr lang="en-GB" dirty="0"/>
-              <a:t>Wave System</a:t>
-            </a:r>
-          </a:p>
-          <a:p>
-            <a:r>
-              <a:rPr lang="en-GB" dirty="0"/>
-              <a:t>Portal </a:t>
-            </a:r>
-          </a:p>
-          <a:p>
-            <a:endParaRPr lang="en-GB" dirty="0"/>
-          </a:p>
-        </p:txBody>
-      </p:sp>
-    </p:spTree>
-    <p:extLst>
-      <p:ext uri="{BB962C8B-B14F-4D97-AF65-F5344CB8AC3E}">
-        <p14:creationId xmlns:p14="http://schemas.microsoft.com/office/powerpoint/2010/main" val="2232123413"/>
-      </p:ext>
-    </p:extLst>
-  </p:cSld>
-  <p:clrMapOvr>
-    <a:masterClrMapping/>
-  </p:clrMapOvr>
-</p:sld>
-</file>
-
-<file path=ppt/slides/slide6.xml><?xml version="1.0" encoding="utf-8"?>
-<p:sld xmlns:a="http://schemas.openxmlformats.org/drawingml/2006/main" xmlns:r="http://schemas.openxmlformats.org/officeDocument/2006/relationships" xmlns:p="http://schemas.openxmlformats.org/presentationml/2006/main">
-  <p:cSld>
-    <p:spTree>
-      <p:nvGrpSpPr>
-        <p:cNvPr id="1" name=""/>
-        <p:cNvGrpSpPr/>
-        <p:nvPr/>
-      </p:nvGrpSpPr>
-      <p:grpSpPr>
-        <a:xfrm>
-          <a:off x="0" y="0"/>
-          <a:ext cx="0" cy="0"/>
-          <a:chOff x="0" y="0"/>
-          <a:chExt cx="0" cy="0"/>
-        </a:xfrm>
-      </p:grpSpPr>
-      <p:sp>
-        <p:nvSpPr>
-          <p:cNvPr id="2" name="Title 1">
-            <a:extLst>
-              <a:ext uri="{FF2B5EF4-FFF2-40B4-BE49-F238E27FC236}">
-                <a16:creationId xmlns:a16="http://schemas.microsoft.com/office/drawing/2014/main" id="{DCDB3DEF-8C3F-B684-3374-46295CF8418E}"/>
-              </a:ext>
-            </a:extLst>
-          </p:cNvPr>
-          <p:cNvSpPr>
-            <a:spLocks noGrp="1"/>
-          </p:cNvSpPr>
-          <p:nvPr>
-            <p:ph type="title"/>
-          </p:nvPr>
-        </p:nvSpPr>
-        <p:spPr/>
-        <p:txBody>
-          <a:bodyPr/>
-          <a:lstStyle/>
-          <a:p>
-            <a:pPr algn="ctr"/>
-            <a:r>
-              <a:rPr lang="en-GB" dirty="0"/>
-              <a:t>Enemy AI Logic</a:t>
-            </a:r>
-          </a:p>
-        </p:txBody>
-      </p:sp>
-      <p:sp>
-        <p:nvSpPr>
-          <p:cNvPr id="3" name="Content Placeholder 2">
-            <a:extLst>
-              <a:ext uri="{FF2B5EF4-FFF2-40B4-BE49-F238E27FC236}">
-                <a16:creationId xmlns:a16="http://schemas.microsoft.com/office/drawing/2014/main" id="{BAF530B5-FFC1-78EE-0189-29DA30D28A70}"/>
-              </a:ext>
-            </a:extLst>
-          </p:cNvPr>
-          <p:cNvSpPr>
-            <a:spLocks noGrp="1"/>
-          </p:cNvSpPr>
-          <p:nvPr>
-            <p:ph idx="1"/>
-          </p:nvPr>
-        </p:nvSpPr>
-        <p:spPr/>
-        <p:txBody>
-          <a:bodyPr/>
-          <a:lstStyle/>
-          <a:p>
-            <a:r>
-              <a:rPr lang="en-GB" dirty="0"/>
-              <a:t>Melee Enemies (Forrest) (Swamp)</a:t>
-            </a:r>
-          </a:p>
-          <a:p>
-            <a:r>
-              <a:rPr lang="en-GB" dirty="0"/>
-              <a:t>Ranged enemies (Desert)</a:t>
-            </a:r>
-          </a:p>
-          <a:p>
-            <a:r>
-              <a:rPr lang="en-GB" dirty="0"/>
-              <a:t>Boss enemies (Desert Boss)</a:t>
-            </a:r>
-          </a:p>
-          <a:p>
-            <a:endParaRPr lang="en-GB" dirty="0"/>
-          </a:p>
-        </p:txBody>
-      </p:sp>
-    </p:spTree>
-    <p:extLst>
-      <p:ext uri="{BB962C8B-B14F-4D97-AF65-F5344CB8AC3E}">
-        <p14:creationId xmlns:p14="http://schemas.microsoft.com/office/powerpoint/2010/main" val="3461582152"/>
-      </p:ext>
-    </p:extLst>
-  </p:cSld>
-  <p:clrMapOvr>
-    <a:masterClrMapping/>
-  </p:clrMapOvr>
-</p:sld>
-</file>
-
-<file path=ppt/slides/slide7.xml><?xml version="1.0" encoding="utf-8"?>
-<p:sld xmlns:a="http://schemas.openxmlformats.org/drawingml/2006/main" xmlns:r="http://schemas.openxmlformats.org/officeDocument/2006/relationships" xmlns:p="http://schemas.openxmlformats.org/presentationml/2006/main">
-  <p:cSld>
-    <p:spTree>
-      <p:nvGrpSpPr>
-        <p:cNvPr id="1" name=""/>
-        <p:cNvGrpSpPr/>
-        <p:nvPr/>
-      </p:nvGrpSpPr>
-      <p:grpSpPr>
-        <a:xfrm>
-          <a:off x="0" y="0"/>
-          <a:ext cx="0" cy="0"/>
-          <a:chOff x="0" y="0"/>
-          <a:chExt cx="0" cy="0"/>
-        </a:xfrm>
-      </p:grpSpPr>
-      <p:sp>
-        <p:nvSpPr>
-          <p:cNvPr id="2" name="Title 1">
-            <a:extLst>
-              <a:ext uri="{FF2B5EF4-FFF2-40B4-BE49-F238E27FC236}">
-                <a16:creationId xmlns:a16="http://schemas.microsoft.com/office/drawing/2014/main" id="{0CBDCF0B-E6BD-C8AC-E4DC-43C85B21077F}"/>
-              </a:ext>
-            </a:extLst>
-          </p:cNvPr>
-          <p:cNvSpPr>
-            <a:spLocks noGrp="1"/>
-          </p:cNvSpPr>
-          <p:nvPr>
-            <p:ph type="title"/>
-          </p:nvPr>
-        </p:nvSpPr>
-        <p:spPr/>
-        <p:txBody>
-          <a:bodyPr/>
-          <a:lstStyle/>
-          <a:p>
-            <a:r>
-              <a:rPr lang="en-GB" dirty="0"/>
-              <a:t>Other</a:t>
-            </a:r>
-          </a:p>
-        </p:txBody>
-      </p:sp>
-      <p:sp>
-        <p:nvSpPr>
-          <p:cNvPr id="3" name="Content Placeholder 2">
-            <a:extLst>
-              <a:ext uri="{FF2B5EF4-FFF2-40B4-BE49-F238E27FC236}">
-                <a16:creationId xmlns:a16="http://schemas.microsoft.com/office/drawing/2014/main" id="{4BC23DF2-A1CF-826B-AFF1-84625B1C6243}"/>
-              </a:ext>
-            </a:extLst>
-          </p:cNvPr>
-          <p:cNvSpPr>
-            <a:spLocks noGrp="1"/>
-          </p:cNvSpPr>
-          <p:nvPr>
-            <p:ph idx="1"/>
-          </p:nvPr>
-        </p:nvSpPr>
-        <p:spPr/>
-        <p:txBody>
-          <a:bodyPr/>
-          <a:lstStyle/>
-          <a:p>
-            <a:r>
-              <a:rPr lang="en-GB" dirty="0"/>
-              <a:t>Animations</a:t>
-            </a:r>
-          </a:p>
-          <a:p>
-            <a:r>
-              <a:rPr lang="en-GB" dirty="0"/>
-              <a:t>Screen UI – </a:t>
-            </a:r>
-            <a:r>
-              <a:rPr lang="en-GB" dirty="0" err="1"/>
-              <a:t>Pasued</a:t>
-            </a:r>
-            <a:r>
-              <a:rPr lang="en-GB" dirty="0"/>
-              <a:t>, Game Over, Start Screen</a:t>
-            </a:r>
-          </a:p>
-          <a:p>
-            <a:r>
-              <a:rPr lang="en-GB" dirty="0"/>
-              <a:t>Responsive design</a:t>
-            </a:r>
-          </a:p>
-          <a:p>
-            <a:r>
-              <a:rPr lang="en-GB" dirty="0"/>
-              <a:t>Sounds</a:t>
-            </a:r>
-          </a:p>
-        </p:txBody>
-      </p:sp>
-    </p:spTree>
-    <p:extLst>
-      <p:ext uri="{BB962C8B-B14F-4D97-AF65-F5344CB8AC3E}">
-        <p14:creationId xmlns:p14="http://schemas.microsoft.com/office/powerpoint/2010/main" val="1756667141"/>
       </p:ext>
     </p:extLst>
   </p:cSld>
